--- a/labs/lab05/slides/slides.pptx
+++ b/labs/lab05/slides/slides.pptx
@@ -5,7 +5,7 @@
     <p:sldMasterId id="2147483696" r:id="rId1"/>
   </p:sldMasterIdLst>
   <p:notesMasterIdLst>
-    <p:notesMasterId r:id="rId18"/>
+    <p:notesMasterId r:id="rId17"/>
   </p:notesMasterIdLst>
   <p:sldIdLst>
     <p:sldId id="256" r:id="rId2"/>
@@ -23,7 +23,6 @@
     <p:sldId id="268" r:id="rId14"/>
     <p:sldId id="269" r:id="rId15"/>
     <p:sldId id="270" r:id="rId16"/>
-    <p:sldId id="271" r:id="rId17"/>
   </p:sldIdLst>
   <p:sldSz cx="12192000" cy="6858000"/>
   <p:notesSz cx="6858000" cy="9144000"/>
@@ -528,7 +527,7 @@
             </a:pPr>
             <a:r>
               <a:rPr/>
-              <a:t>Ask students to open the worksheet, Zotero, and the UNL Libraries database page. They should already have selected a final-project dataset and core variable.</a:t>
+              <a:t>Have students identify their dataset and core variable before they start. Their preproposal must match that dataset.</a:t>
             </a:r>
           </a:p>
         </p:txBody>
@@ -610,7 +609,7 @@
             </a:pPr>
             <a:r>
               <a:rPr/>
-              <a:t>This is worksheet Step 4. Review sources are useful maps, but the final project still needs at least three empirical, peer-reviewed journal articles.</a:t>
+              <a:t>If there’s no entry for the exact construct, try a broader chapter. Save reviews and encyclopedia entries alongside the empirical articles in Zotero.</a:t>
             </a:r>
           </a:p>
         </p:txBody>
@@ -692,7 +691,7 @@
             </a:pPr>
             <a:r>
               <a:rPr/>
-              <a:t>This is worksheet Step 5. Model one revision from too broad to useful. The target range is a practical guide, not a rule that replaces judgment.</a:t>
+              <a:t>Try a broader keyword for too few hits, or add a term with AND for too many. Use NOT carefully; it may exclude useful papers. Record each attempt in the table.</a:t>
             </a:r>
           </a:p>
         </p:txBody>
@@ -774,7 +773,7 @@
             </a:pPr>
             <a:r>
               <a:rPr/>
-              <a:t>This is worksheet Step 6. PsycINFO should be the primary practice tool, but an author’s website or Google Scholar can help identify complete publication information.</a:t>
+              <a:t>Check every name in the author list. Use the Step 5 table fields again. Fewer hits may make sense for an author with fewer publications; their website or Google Scholar can help find other work.</a:t>
             </a:r>
           </a:p>
         </p:txBody>
@@ -856,7 +855,7 @@
             </a:pPr>
             <a:r>
               <a:rPr/>
-              <a:t>Students will collect more than the minimum, then select the strongest sources. Remind them that relevance and design quality matter more than citation count alone.</a:t>
+              <a:t>Ask students to explain how one of their chosen articles informs their question or hypothesis. Reviews and encyclopedia entries can stay in the collection.</a:t>
             </a:r>
           </a:p>
         </p:txBody>
@@ -938,7 +937,7 @@
             </a:pPr>
             <a:r>
               <a:rPr/>
-              <a:t>The worksheet requires at least 12 collected references, including at least three empirical, peer-reviewed journal articles that can support the project. Demonstrate generating a bibliography from the collection if students need a reminder.</a:t>
+              <a:t>Check the Zotero records before creating the reference page, then check alphabetization and double spacing. Have students reopen both files before submitting to confirm their work saved.</a:t>
             </a:r>
           </a:p>
         </p:txBody>
@@ -961,88 +960,6 @@
             <a:fld id="{18BDFEC3-8487-43E8-A154-7C12CBC1FFF2}" type="slidenum">
               <a:rPr lang="en-US"/>
               <a:t>15</a:t>
-            </a:fld>
-            <a:endParaRPr lang="en-US"/>
-          </a:p>
-        </p:txBody>
-      </p:sp>
-    </p:spTree>
-  </p:cSld>
-</p:notes>
-</file>
-
-<file path=ppt/notesSlides/notesSlide15.xml><?xml version="1.0" encoding="utf-8"?>
-<p:notes xmlns:a="http://schemas.openxmlformats.org/drawingml/2006/main" xmlns:r="http://schemas.openxmlformats.org/officeDocument/2006/relationships" xmlns:p="http://schemas.openxmlformats.org/presentationml/2006/main">
-  <p:cSld>
-    <p:spTree>
-      <p:nvGrpSpPr>
-        <p:cNvPr id="1" name=""/>
-        <p:cNvGrpSpPr/>
-        <p:nvPr/>
-      </p:nvGrpSpPr>
-      <p:grpSpPr>
-        <a:xfrm>
-          <a:off x="0" y="0"/>
-          <a:ext cx="0" cy="0"/>
-          <a:chOff x="0" y="0"/>
-          <a:chExt cx="0" cy="0"/>
-        </a:xfrm>
-      </p:grpSpPr>
-      <p:sp>
-        <p:nvSpPr>
-          <p:cNvPr id="2" name="Slide Image Placeholder 1"/>
-          <p:cNvSpPr>
-            <a:spLocks noGrp="1" noRot="1" noChangeAspect="1"/>
-          </p:cNvSpPr>
-          <p:nvPr>
-            <p:ph type="sldImg"/>
-          </p:nvPr>
-        </p:nvSpPr>
-        <p:spPr/>
-      </p:sp>
-      <p:sp>
-        <p:nvSpPr>
-          <p:cNvPr id="3" name="Notes Placeholder 2"/>
-          <p:cNvSpPr>
-            <a:spLocks noGrp="1"/>
-          </p:cNvSpPr>
-          <p:nvPr>
-            <p:ph type="body" idx="1"/>
-          </p:nvPr>
-        </p:nvSpPr>
-        <p:spPr/>
-        <p:txBody>
-          <a:bodyPr/>
-          <a:lstStyle/>
-          <a:p>
-            <a:pPr lvl="0" indent="0" marL="0">
-              <a:buNone/>
-            </a:pPr>
-            <a:r>
-              <a:rPr/>
-              <a:t>Give students time to compare their work against the worksheet point values. The most common problems are searching the measure instead of the construct and trusting imported citation metadata without checking it.</a:t>
-            </a:r>
-          </a:p>
-        </p:txBody>
-      </p:sp>
-      <p:sp>
-        <p:nvSpPr>
-          <p:cNvPr id="4" name="Slide Number Placeholder 3"/>
-          <p:cNvSpPr>
-            <a:spLocks noGrp="1"/>
-          </p:cNvSpPr>
-          <p:nvPr>
-            <p:ph type="sldNum" sz="quarter" idx="10"/>
-          </p:nvPr>
-        </p:nvSpPr>
-        <p:spPr/>
-        <p:txBody>
-          <a:bodyPr/>
-          <a:lstStyle/>
-          <a:p>
-            <a:fld id="{18BDFEC3-8487-43E8-A154-7C12CBC1FFF2}" type="slidenum">
-              <a:rPr lang="en-US"/>
-              <a:t>16</a:t>
             </a:fld>
             <a:endParaRPr lang="en-US"/>
           </a:p>
@@ -1102,7 +1019,7 @@
             </a:pPr>
             <a:r>
               <a:rPr/>
-              <a:t>The goal is not to collect isolated PDFs. Each useful article should lead to terminology, authors, cited sources, or newer work that strengthens the project literature.</a:t>
+              <a:t>Point to the literature review and hypothesis steps in the diagram. Ask students what they need to know about their construct before choosing a relationship to test.</a:t>
             </a:r>
           </a:p>
         </p:txBody>
@@ -1184,7 +1101,7 @@
             </a:pPr>
             <a:r>
               <a:rPr/>
-              <a:t>This is worksheet Step 1. Warn students not to search only for the scale name. A measure is one operationalization; the literature search should begin with the broader psychological construct.</a:t>
+              <a:t>Ask what “big” means in the Superman example, then have students define their own construct. Searching only a scale name can miss studies that use other measures.</a:t>
             </a:r>
           </a:p>
         </p:txBody>
@@ -1266,7 +1183,7 @@
             </a:pPr>
             <a:r>
               <a:rPr/>
-              <a:t>Students will paste citations into the worksheet as they go and use the collection to create the final APA reference page. Remind them that imported metadata can still contain errors.</a:t>
+              <a:t>Point out collections, items, and item details in the three panels. If needed, check one imported record together before students start saving sources.</a:t>
             </a:r>
           </a:p>
         </p:txBody>
@@ -1348,7 +1265,7 @@
             </a:pPr>
             <a:r>
               <a:rPr/>
-              <a:t>Model how to open PsycINFO from the library website. Students may use Google Scholar as a supplement, but the worksheet asks them to practice the structured database tools.</a:t>
+              <a:t>Show how to reach PsycINFO through UNL Libraries. Use PsycINFO for the worksheet searches; Google Scholar can help locate a source or follow citations.</a:t>
             </a:r>
           </a:p>
         </p:txBody>
@@ -1430,7 +1347,7 @@
             </a:pPr>
             <a:r>
               <a:rPr/>
-              <a:t>Older does not automatically mean foundational. Citation counts, terminology, and later articles’ descriptions can help students judge whether a source is a useful anchor.</a:t>
+              <a:t>Ask why later researchers cite the article: do they use its findings or methods? Its age alone doesn’t make it a classic.</a:t>
             </a:r>
           </a:p>
         </p:txBody>
@@ -1512,7 +1429,7 @@
             </a:pPr>
             <a:r>
               <a:rPr/>
-              <a:t>The recent anchor shows current theories, measures, and questions. Relevance to the student’s project matters more than selecting the newest article in the list.</a:t>
+              <a:t>Ask how the article relates to the student’s construct or proposed relationship. The newest result isn’t always the best fit.</a:t>
             </a:r>
           </a:p>
         </p:txBody>
@@ -1594,7 +1511,15 @@
             </a:pPr>
             <a:r>
               <a:rPr/>
-              <a:t>This is worksheet Step 2. If the forward search produces little relevant work, students should reconsider whether their classic article is truly central to the construct.</a:t>
+              <a:t>A paper’s reference list leads backward; </a:t>
+            </a:r>
+            <a:r>
+              <a:rPr b="1"/>
+              <a:t>Cited by</a:t>
+            </a:r>
+            <a:r>
+              <a:rPr/>
+              <a:t> leads forward. If the recent citing papers aren’t useful, revisit the choice of classic.</a:t>
             </a:r>
           </a:p>
         </p:txBody>
@@ -1676,7 +1601,7 @@
             </a:pPr>
             <a:r>
               <a:rPr/>
-              <a:t>This is worksheet Step 3. Students should not pick citations at random. They should verify the article’s topic and usefulness before adding it to Zotero.</a:t>
+              <a:t>Students can also follow the bibliography of a paper the recent article cites. They should check abstracts before choosing.</a:t>
             </a:r>
           </a:p>
         </p:txBody>
@@ -2967,8 +2892,8 @@
         </p:nvSpPr>
         <p:spPr>
           <a:xfrm>
-            <a:off x="1583436" y="2313433"/>
-            <a:ext cx="4270248" cy="704087"/>
+            <a:off x="1097280" y="2313433"/>
+            <a:ext cx="4907280" cy="548640"/>
           </a:xfrm>
         </p:spPr>
         <p:txBody>
@@ -3040,8 +2965,8 @@
         </p:nvSpPr>
         <p:spPr>
           <a:xfrm>
-            <a:off x="1583436" y="3143250"/>
-            <a:ext cx="4270248" cy="2596776"/>
+            <a:off x="1097280" y="2926080"/>
+            <a:ext cx="4907280" cy="3177540"/>
           </a:xfrm>
         </p:spPr>
         <p:txBody>
@@ -3097,8 +3022,8 @@
         </p:nvSpPr>
         <p:spPr>
           <a:xfrm>
-            <a:off x="6338316" y="3143250"/>
-            <a:ext cx="4253484" cy="2596776"/>
+            <a:off x="6187440" y="2926080"/>
+            <a:ext cx="4907280" cy="3177540"/>
           </a:xfrm>
         </p:spPr>
         <p:txBody>
@@ -3158,8 +3083,8 @@
         </p:nvSpPr>
         <p:spPr>
           <a:xfrm>
-            <a:off x="6338316" y="2313433"/>
-            <a:ext cx="4270248" cy="704087"/>
+            <a:off x="6187440" y="2313433"/>
+            <a:ext cx="4907280" cy="548640"/>
           </a:xfrm>
         </p:spPr>
         <p:txBody>
@@ -3294,7 +3219,12 @@
             <p:ph type="title"/>
           </p:nvPr>
         </p:nvSpPr>
-        <p:spPr/>
+        <p:spPr>
+          <a:xfrm>
+            <a:off x="1097280" y="964692"/>
+            <a:ext cx="9997440" cy="1188720"/>
+          </a:xfrm>
+        </p:spPr>
         <p:txBody>
           <a:bodyPr/>
           <a:lstStyle/>
@@ -4921,7 +4851,7 @@
             </a:pPr>
             <a:r>
               <a:rPr/>
-              <a:t>Lab 05 · Build a Research Trail</a:t>
+              <a:t>Lab 05 · Literature Search</a:t>
             </a:r>
             <a:br/>
             <a:br/>
@@ -4984,57 +4914,36 @@
           </a:p>
         </p:txBody>
       </p:sp>
-      <p:pic>
-        <p:nvPicPr>
-          <p:cNvPr descr="Reference list at the end of a recent article, used to trace earlier relevant research" id="0" name="Picture 1"/>
-          <p:cNvPicPr>
-            <a:picLocks noGrp="1" noChangeAspect="1"/>
-          </p:cNvPicPr>
-          <p:nvPr/>
-        </p:nvPicPr>
-        <p:blipFill>
-          <a:blip r:embed="rId3"/>
-          <a:stretch>
-            <a:fillRect/>
-          </a:stretch>
-        </p:blipFill>
-        <p:spPr bwMode="auto">
-          <a:xfrm>
-            <a:off x="1485900" y="2628900"/>
-            <a:ext cx="4114800" cy="3098800"/>
-          </a:xfrm>
-          <a:prstGeom prst="rect">
-            <a:avLst/>
-          </a:prstGeom>
-          <a:noFill/>
-          <a:ln w="9525">
-            <a:noFill/>
-            <a:headEnd/>
-            <a:tailEnd/>
-          </a:ln>
-        </p:spPr>
-      </p:pic>
-      <p:sp>
-        <p:nvSpPr>
-          <p:cNvPr id="4" name="Content Placeholder 3"/>
-          <p:cNvSpPr>
-            <a:spLocks noGrp="1"/>
-          </p:cNvSpPr>
-          <p:nvPr>
-            <p:ph idx="2" sz="half"/>
-          </p:nvPr>
-        </p:nvSpPr>
-        <p:spPr/>
-        <p:txBody>
-          <a:bodyPr/>
-          <a:lstStyle/>
+      <p:sp>
+        <p:nvSpPr>
+          <p:cNvPr id="3" name="Content Placeholder 2"/>
+          <p:cNvSpPr>
+            <a:spLocks noGrp="1"/>
+          </p:cNvSpPr>
+          <p:nvPr>
+            <p:ph idx="1"/>
+          </p:nvPr>
+        </p:nvSpPr>
+        <p:spPr/>
+        <p:txBody>
+          <a:bodyPr/>
+          <a:lstStyle/>
+          <a:p>
+            <a:pPr lvl="0" indent="0" marL="0">
+              <a:buNone/>
+            </a:pPr>
+            <a:r>
+              <a:rPr/>
+              <a:t>[Worksheet Step 3]</a:t>
+            </a:r>
+          </a:p>
           <a:p>
             <a:pPr lvl="0" indent="-457200" marL="457200">
               <a:buAutoNum type="arabicPeriod"/>
             </a:pPr>
             <a:r>
               <a:rPr/>
-              <a:t>Open the recent article’s references.</a:t>
+              <a:t>Open your recent article’s reference list</a:t>
             </a:r>
           </a:p>
           <a:p>
@@ -5043,7 +4952,7 @@
             </a:pPr>
             <a:r>
               <a:rPr/>
-              <a:t>Identify promising titles and authors.</a:t>
+              <a:t>Identify promising titles and look up their abstracts</a:t>
             </a:r>
           </a:p>
           <a:p>
@@ -5052,7 +4961,11 @@
             </a:pPr>
             <a:r>
               <a:rPr/>
-              <a:t>Look up each record and abstract.</a:t>
+              <a:t>Choose </a:t>
+            </a:r>
+            <a:r>
+              <a:rPr b="1"/>
+              <a:t>at least three useful references</a:t>
             </a:r>
           </a:p>
           <a:p>
@@ -5061,7 +4974,7 @@
             </a:pPr>
             <a:r>
               <a:rPr/>
-              <a:t>Save three useful sources.</a:t>
+              <a:t>Save them in Zotero and paste their reference entries</a:t>
             </a:r>
           </a:p>
         </p:txBody>
@@ -5113,7 +5026,7 @@
             </a:pPr>
             <a:r>
               <a:rPr/>
-              <a:t>10 Map the field’s scope</a:t>
+              <a:t>10 Get an overview of your topic</a:t>
             </a:r>
           </a:p>
         </p:txBody>
@@ -5133,32 +5046,49 @@
           <a:bodyPr/>
           <a:lstStyle/>
           <a:p>
+            <a:pPr lvl="0" indent="0" marL="0">
+              <a:buNone/>
+            </a:pPr>
+            <a:r>
+              <a:rPr/>
+              <a:t>[Worksheet Step 4]</a:t>
+            </a:r>
+          </a:p>
+          <a:p>
             <a:pPr lvl="0"/>
             <a:r>
               <a:rPr/>
-              <a:t>Find an </a:t>
+              <a:t>Find one </a:t>
             </a:r>
             <a:r>
               <a:rPr b="1"/>
-              <a:t>Annual Review</a:t>
-            </a:r>
-            <a:r>
-              <a:rPr/>
-              <a:t> article or encyclopedia entry.</a:t>
+              <a:t>Annual Review of Psychology</a:t>
+            </a:r>
+            <a:r>
+              <a:rPr/>
+              <a:t> article or </a:t>
+            </a:r>
+            <a:r>
+              <a:rPr b="1"/>
+              <a:t>encyclopedia entry</a:t>
+            </a:r>
+            <a:r>
+              <a:rPr/>
+              <a:t> about your construct</a:t>
             </a:r>
           </a:p>
           <a:p>
             <a:pPr lvl="0"/>
             <a:r>
               <a:rPr/>
-              <a:t>Use it to learn the field’s vocabulary and major subtopics.</a:t>
+              <a:t>Identify useful terms and subtopics</a:t>
             </a:r>
           </a:p>
           <a:p>
             <a:pPr lvl="0"/>
             <a:r>
               <a:rPr/>
-              <a:t>Search a broader topic if the exact construct has no review.</a:t>
+              <a:t>Paste its reference entry and highlight the source type you chose</a:t>
             </a:r>
           </a:p>
         </p:txBody>
@@ -5215,100 +5145,87 @@
           </a:p>
         </p:txBody>
       </p:sp>
-      <p:pic>
-        <p:nvPicPr>
-          <p:cNvPr descr="PsycINFO advanced search with multiple concept terms combined in separate search rows" id="0" name="Picture 1"/>
-          <p:cNvPicPr>
-            <a:picLocks noGrp="1" noChangeAspect="1"/>
-          </p:cNvPicPr>
-          <p:nvPr/>
-        </p:nvPicPr>
-        <p:blipFill>
-          <a:blip r:embed="rId3"/>
-          <a:stretch>
-            <a:fillRect/>
-          </a:stretch>
-        </p:blipFill>
-        <p:spPr bwMode="auto">
-          <a:xfrm>
-            <a:off x="1612900" y="2628900"/>
-            <a:ext cx="3860800" cy="3098800"/>
-          </a:xfrm>
-          <a:prstGeom prst="rect">
-            <a:avLst/>
-          </a:prstGeom>
-          <a:noFill/>
-          <a:ln w="9525">
-            <a:noFill/>
-            <a:headEnd/>
-            <a:tailEnd/>
-          </a:ln>
-        </p:spPr>
-      </p:pic>
-      <p:sp>
-        <p:nvSpPr>
-          <p:cNvPr id="4" name="Content Placeholder 3"/>
-          <p:cNvSpPr>
-            <a:spLocks noGrp="1"/>
-          </p:cNvSpPr>
-          <p:nvPr>
-            <p:ph idx="2" sz="half"/>
-          </p:nvPr>
-        </p:nvSpPr>
-        <p:spPr/>
-        <p:txBody>
-          <a:bodyPr/>
-          <a:lstStyle/>
-          <a:p>
-            <a:pPr lvl="0"/>
-            <a:r>
-              <a:rPr/>
-              <a:t>Combine the construct with a related term.</a:t>
-            </a:r>
-          </a:p>
-          <a:p>
-            <a:pPr lvl="0"/>
-            <a:r>
-              <a:rPr/>
-              <a:t>Use </a:t>
+      <p:sp>
+        <p:nvSpPr>
+          <p:cNvPr id="3" name="Content Placeholder 2"/>
+          <p:cNvSpPr>
+            <a:spLocks noGrp="1"/>
+          </p:cNvSpPr>
+          <p:nvPr>
+            <p:ph idx="1"/>
+          </p:nvPr>
+        </p:nvSpPr>
+        <p:spPr/>
+        <p:txBody>
+          <a:bodyPr/>
+          <a:lstStyle/>
+          <a:p>
+            <a:pPr lvl="0" indent="0" marL="0">
+              <a:buNone/>
+            </a:pPr>
+            <a:r>
+              <a:rPr/>
+              <a:t>[Worksheet Step 5]</a:t>
+            </a:r>
+          </a:p>
+          <a:p>
+            <a:pPr lvl="0" indent="-457200" marL="457200">
+              <a:buAutoNum type="arabicPeriod"/>
+            </a:pPr>
+            <a:r>
+              <a:rPr/>
+              <a:t>In </a:t>
             </a:r>
             <a:r>
               <a:rPr b="1"/>
-              <a:t>AND</a:t>
-            </a:r>
-            <a:r>
-              <a:rPr/>
-              <a:t> to narrow and </a:t>
+              <a:t>PsycINFO</a:t>
+            </a:r>
+            <a:r>
+              <a:rPr/>
+              <a:t>, search your construct with a keyword from your sources</a:t>
+            </a:r>
+          </a:p>
+          <a:p>
+            <a:pPr lvl="0" indent="-457200" marL="457200">
+              <a:buAutoNum type="arabicPeriod"/>
+            </a:pPr>
+            <a:r>
+              <a:rPr/>
+              <a:t>Record </a:t>
             </a:r>
             <a:r>
               <a:rPr b="1"/>
-              <a:t>NOT</a:t>
-            </a:r>
-            <a:r>
-              <a:rPr/>
-              <a:t> cautiously.</a:t>
-            </a:r>
-          </a:p>
-          <a:p>
-            <a:pPr lvl="0"/>
-            <a:r>
-              <a:rPr/>
-              <a:t>Record each attempt and its number of hits.</a:t>
-            </a:r>
-          </a:p>
-          <a:p>
-            <a:pPr lvl="0"/>
-            <a:r>
-              <a:rPr/>
-              <a:t>Aim for roughly </a:t>
+              <a:t>terms, limits/filters, hits, and what to try next</a:t>
+            </a:r>
+          </a:p>
+          <a:p>
+            <a:pPr lvl="0" indent="-457200" marL="457200">
+              <a:buAutoNum type="arabicPeriod"/>
+            </a:pPr>
+            <a:r>
+              <a:rPr/>
+              <a:t>Adjust the search to get roughly </a:t>
             </a:r>
             <a:r>
               <a:rPr b="1"/>
               <a:t>30–100 results</a:t>
             </a:r>
-            <a:r>
-              <a:rPr/>
-              <a:t>.</a:t>
+          </a:p>
+          <a:p>
+            <a:pPr lvl="0" indent="-457200" marL="457200">
+              <a:buAutoNum type="arabicPeriod"/>
+            </a:pPr>
+            <a:r>
+              <a:rPr/>
+              <a:t>Select </a:t>
+            </a:r>
+            <a:r>
+              <a:rPr b="1"/>
+              <a:t>three references</a:t>
+            </a:r>
+            <a:r>
+              <a:rPr/>
+              <a:t>, save them, and paste their entries</a:t>
             </a:r>
           </a:p>
         </p:txBody>
@@ -5365,57 +5282,36 @@
           </a:p>
         </p:txBody>
       </p:sp>
-      <p:pic>
-        <p:nvPicPr>
-          <p:cNvPr descr="Author-focused scholarly search results used to locate additional work by a recurring researcher" id="0" name="Picture 1"/>
-          <p:cNvPicPr>
-            <a:picLocks noGrp="1" noChangeAspect="1"/>
-          </p:cNvPicPr>
-          <p:nvPr/>
-        </p:nvPicPr>
-        <p:blipFill>
-          <a:blip r:embed="rId3"/>
-          <a:stretch>
-            <a:fillRect/>
-          </a:stretch>
-        </p:blipFill>
-        <p:spPr bwMode="auto">
-          <a:xfrm>
-            <a:off x="1485900" y="2628900"/>
-            <a:ext cx="4114800" cy="3098800"/>
-          </a:xfrm>
-          <a:prstGeom prst="rect">
-            <a:avLst/>
-          </a:prstGeom>
-          <a:noFill/>
-          <a:ln w="9525">
-            <a:noFill/>
-            <a:headEnd/>
-            <a:tailEnd/>
-          </a:ln>
-        </p:spPr>
-      </p:pic>
-      <p:sp>
-        <p:nvSpPr>
-          <p:cNvPr id="4" name="Content Placeholder 3"/>
-          <p:cNvSpPr>
-            <a:spLocks noGrp="1"/>
-          </p:cNvSpPr>
-          <p:nvPr>
-            <p:ph idx="2" sz="half"/>
-          </p:nvPr>
-        </p:nvSpPr>
-        <p:spPr/>
-        <p:txBody>
-          <a:bodyPr/>
-          <a:lstStyle/>
+      <p:sp>
+        <p:nvSpPr>
+          <p:cNvPr id="3" name="Content Placeholder 2"/>
+          <p:cNvSpPr>
+            <a:spLocks noGrp="1"/>
+          </p:cNvSpPr>
+          <p:nvPr>
+            <p:ph idx="1"/>
+          </p:nvPr>
+        </p:nvSpPr>
+        <p:spPr/>
+        <p:txBody>
+          <a:bodyPr/>
+          <a:lstStyle/>
+          <a:p>
+            <a:pPr lvl="0" indent="0" marL="0">
+              <a:buNone/>
+            </a:pPr>
+            <a:r>
+              <a:rPr/>
+              <a:t>[Worksheet Step 6]</a:t>
+            </a:r>
+          </a:p>
           <a:p>
             <a:pPr lvl="0" indent="-457200" marL="457200">
               <a:buAutoNum type="arabicPeriod"/>
             </a:pPr>
             <a:r>
               <a:rPr/>
-              <a:t>Notice names that recur.</a:t>
+              <a:t>Identify an author who appears in several sources</a:t>
             </a:r>
           </a:p>
           <a:p>
@@ -5424,7 +5320,19 @@
             </a:pPr>
             <a:r>
               <a:rPr/>
-              <a:t>Search the author plus a topic term.</a:t>
+              <a:t>Search their name in the </a:t>
+            </a:r>
+            <a:r>
+              <a:rPr b="1"/>
+              <a:t>Author</a:t>
+            </a:r>
+            <a:r>
+              <a:rPr/>
+              <a:t> field plus a topic term in </a:t>
+            </a:r>
+            <a:r>
+              <a:rPr b="1"/>
+              <a:t>PsycINFO</a:t>
             </a:r>
           </a:p>
           <a:p>
@@ -5433,15 +5341,11 @@
             </a:pPr>
             <a:r>
               <a:rPr/>
-              <a:t>Aim for </a:t>
+              <a:t>Record each attempt; aim for roughly </a:t>
             </a:r>
             <a:r>
               <a:rPr b="1"/>
-              <a:t>10–30 focused results</a:t>
-            </a:r>
-            <a:r>
-              <a:rPr/>
-              <a:t>.</a:t>
+              <a:t>10–30 results</a:t>
             </a:r>
           </a:p>
           <a:p>
@@ -5450,7 +5354,15 @@
             </a:pPr>
             <a:r>
               <a:rPr/>
-              <a:t>Save three useful articles.</a:t>
+              <a:t>Select </a:t>
+            </a:r>
+            <a:r>
+              <a:rPr b="1"/>
+              <a:t>three references</a:t>
+            </a:r>
+            <a:r>
+              <a:rPr/>
+              <a:t>, save them, and paste their entries</a:t>
             </a:r>
           </a:p>
         </p:txBody>
@@ -5502,7 +5414,7 @@
             </a:pPr>
             <a:r>
               <a:rPr/>
-              <a:t>13 Choose sources deliberately</a:t>
+              <a:t>13 Choose sources for your project</a:t>
             </a:r>
           </a:p>
         </p:txBody>
@@ -5527,43 +5439,29 @@
             </a:pPr>
             <a:r>
               <a:rPr/>
-              <a:t>For each candidate, ask:</a:t>
-            </a:r>
-          </a:p>
-          <a:p>
-            <a:pPr lvl="0" indent="-457200" marL="457200">
-              <a:buAutoNum type="arabicPeriod"/>
-            </a:pPr>
-            <a:r>
-              <a:rPr/>
-              <a:t>Is it empirical and peer reviewed?</a:t>
-            </a:r>
-          </a:p>
-          <a:p>
-            <a:pPr lvl="0" indent="-457200" marL="457200">
-              <a:buAutoNum type="arabicPeriod"/>
-            </a:pPr>
-            <a:r>
-              <a:rPr/>
-              <a:t>Does it address the construct or a useful relationship?</a:t>
-            </a:r>
-          </a:p>
-          <a:p>
-            <a:pPr lvl="0" indent="-457200" marL="457200">
-              <a:buAutoNum type="arabicPeriod"/>
-            </a:pPr>
-            <a:r>
-              <a:rPr/>
-              <a:t>Can it support the project’s rationale or hypothesis?</a:t>
-            </a:r>
-          </a:p>
-          <a:p>
-            <a:pPr lvl="0" indent="-457200" marL="457200">
-              <a:buAutoNum type="arabicPeriod"/>
-            </a:pPr>
-            <a:r>
-              <a:rPr/>
-              <a:t>Is the full text available and readable?</a:t>
+              <a:t>Identify </a:t>
+            </a:r>
+            <a:r>
+              <a:rPr b="1"/>
+              <a:t>at least three empirical, peer-reviewed journal articles</a:t>
+            </a:r>
+            <a:r>
+              <a:rPr/>
+              <a:t> for your preproposal</a:t>
+            </a:r>
+          </a:p>
+          <a:p>
+            <a:pPr lvl="0"/>
+            <a:r>
+              <a:rPr/>
+              <a:t>How does each article address your construct or proposed relationship?</a:t>
+            </a:r>
+          </a:p>
+          <a:p>
+            <a:pPr lvl="0"/>
+            <a:r>
+              <a:rPr/>
+              <a:t>Which finding or method helps you develop the project?</a:t>
             </a:r>
           </a:p>
         </p:txBody>
@@ -5615,7 +5513,7 @@
             </a:pPr>
             <a:r>
               <a:rPr/>
-              <a:t>14 Finish with one clean collection</a:t>
+              <a:t>14 Finish the worksheet and preproposal</a:t>
             </a:r>
           </a:p>
         </p:txBody>
@@ -5640,7 +5538,7 @@
             </a:pPr>
             <a:r>
               <a:rPr/>
-              <a:t>Confirm at least 12 collected references.</a:t>
+              <a:t>Complete all six steps and requested reference entries</a:t>
             </a:r>
           </a:p>
           <a:p>
@@ -5649,7 +5547,23 @@
             </a:pPr>
             <a:r>
               <a:rPr/>
-              <a:t>Identify at least three empirical, peer-reviewed journal articles that can support the project.</a:t>
+              <a:t>Check that you have </a:t>
+            </a:r>
+            <a:r>
+              <a:rPr b="1"/>
+              <a:t>at least 12 references</a:t>
+            </a:r>
+            <a:r>
+              <a:rPr/>
+              <a:t> and add an </a:t>
+            </a:r>
+            <a:r>
+              <a:rPr b="1"/>
+              <a:t>APA reference page</a:t>
+            </a:r>
+            <a:r>
+              <a:rPr/>
+              <a:t> listing them all</a:t>
             </a:r>
           </a:p>
           <a:p>
@@ -5658,7 +5572,7 @@
             </a:pPr>
             <a:r>
               <a:rPr/>
-              <a:t>Repair titles, authors, dates, and DOIs in Zotero.</a:t>
+              <a:t>Complete the preproposal that matches your dataset</a:t>
             </a:r>
           </a:p>
           <a:p>
@@ -5667,110 +5581,11 @@
             </a:pPr>
             <a:r>
               <a:rPr/>
-              <a:t>Generate an APA 7 reference list for all collected sources and paste it into the worksheet’s References page.</a:t>
-            </a:r>
-          </a:p>
-        </p:txBody>
-      </p:sp>
-    </p:spTree>
-  </p:cSld>
-</p:sld>
-</file>
-
-<file path=ppt/slides/slide16.xml><?xml version="1.0" encoding="utf-8"?>
-<p:sld xmlns:a="http://schemas.openxmlformats.org/drawingml/2006/main" xmlns:r="http://schemas.openxmlformats.org/officeDocument/2006/relationships" xmlns:p="http://schemas.openxmlformats.org/presentationml/2006/main">
-  <p:cSld>
-    <p:spTree>
-      <p:nvGrpSpPr>
-        <p:cNvPr id="1" name=""/>
-        <p:cNvGrpSpPr/>
-        <p:nvPr/>
-      </p:nvGrpSpPr>
-      <p:grpSpPr>
-        <a:xfrm>
-          <a:off x="0" y="0"/>
-          <a:ext cx="0" cy="0"/>
-          <a:chOff x="0" y="0"/>
-          <a:chExt cx="0" cy="0"/>
-        </a:xfrm>
-      </p:grpSpPr>
-      <p:sp>
-        <p:nvSpPr>
-          <p:cNvPr id="2" name="Title 1"/>
-          <p:cNvSpPr>
-            <a:spLocks noGrp="1"/>
-          </p:cNvSpPr>
-          <p:nvPr>
-            <p:ph type="title"/>
-          </p:nvPr>
-        </p:nvSpPr>
-        <p:spPr>
-          <a:xfrm>
-            <a:off x="1097280" y="964692"/>
-            <a:ext cx="9997440" cy="1188720"/>
-          </a:xfrm>
-        </p:spPr>
-        <p:txBody>
-          <a:bodyPr/>
-          <a:lstStyle/>
-          <a:p>
-            <a:pPr lvl="0" indent="0" marL="0">
-              <a:buNone/>
-            </a:pPr>
-            <a:r>
-              <a:rPr/>
-              <a:t>15 Check before submitting</a:t>
-            </a:r>
-          </a:p>
-        </p:txBody>
-      </p:sp>
-      <p:sp>
-        <p:nvSpPr>
-          <p:cNvPr id="3" name="Content Placeholder 2"/>
-          <p:cNvSpPr>
-            <a:spLocks noGrp="1"/>
-          </p:cNvSpPr>
-          <p:nvPr>
-            <p:ph idx="1"/>
-          </p:nvPr>
-        </p:nvSpPr>
-        <p:spPr/>
-        <p:txBody>
-          <a:bodyPr/>
-          <a:lstStyle/>
-          <a:p>
-            <a:pPr lvl="0"/>
-            <a:r>
-              <a:rPr/>
-              <a:t>Every worksheet step is complete.</a:t>
-            </a:r>
-          </a:p>
-          <a:p>
-            <a:pPr lvl="0"/>
-            <a:r>
-              <a:rPr/>
-              <a:t>The collection contains at least 12 references, including at least three empirical, peer-reviewed journal articles.</a:t>
-            </a:r>
-          </a:p>
-          <a:p>
-            <a:pPr lvl="0"/>
-            <a:r>
-              <a:rPr/>
-              <a:t>Citations appear in the requested boxes.</a:t>
-            </a:r>
-          </a:p>
-          <a:p>
-            <a:pPr lvl="0"/>
-            <a:r>
-              <a:rPr/>
-              <a:t>The final reference page is alphabetized and double-spaced.</a:t>
-            </a:r>
-          </a:p>
-          <a:p>
-            <a:pPr lvl="0"/>
-            <a:r>
-              <a:rPr/>
-              <a:t>Zotero metadata has been checked against each article.</a:t>
+              <a:t>Submit </a:t>
+            </a:r>
+            <a:r>
+              <a:rPr b="1"/>
+              <a:t>both the worksheet and preproposal before Week 6</a:t>
             </a:r>
           </a:p>
         </p:txBody>
@@ -5822,69 +5637,269 @@
             </a:pPr>
             <a:r>
               <a:rPr/>
-              <a:t>1 Prepare your search workspace</a:t>
-            </a:r>
-          </a:p>
-        </p:txBody>
-      </p:sp>
-      <p:sp>
-        <p:nvSpPr>
-          <p:cNvPr id="3" name="Content Placeholder 2"/>
-          <p:cNvSpPr>
-            <a:spLocks noGrp="1"/>
-          </p:cNvSpPr>
-          <p:nvPr>
-            <p:ph idx="1"/>
-          </p:nvPr>
-        </p:nvSpPr>
-        <p:spPr/>
-        <p:txBody>
-          <a:bodyPr/>
-          <a:lstStyle/>
-          <a:p>
-            <a:pPr lvl="0"/>
-            <a:r>
-              <a:rPr b="1"/>
-              <a:t>Worksheet:</a:t>
-            </a:r>
-            <a:r>
-              <a:rPr/>
-              <a:t> Lab 05 Literature Search</a:t>
-            </a:r>
-          </a:p>
-          <a:p>
-            <a:pPr lvl="0"/>
-            <a:r>
-              <a:rPr b="1"/>
-              <a:t>Project:</a:t>
-            </a:r>
-            <a:r>
-              <a:rPr/>
-              <a:t> chosen dataset and core variable</a:t>
-            </a:r>
-          </a:p>
-          <a:p>
-            <a:pPr lvl="0"/>
-            <a:r>
-              <a:rPr b="1"/>
-              <a:t>Tools:</a:t>
-            </a:r>
-            <a:r>
-              <a:rPr/>
-              <a:t> PsycINFO, Zotero, and article PDFs</a:t>
-            </a:r>
-          </a:p>
-          <a:p>
-            <a:pPr lvl="0" indent="0" marL="0">
-              <a:buNone/>
-            </a:pPr>
-            <a:r>
-              <a:rPr/>
-              <a:t>Today’s path: </a:t>
-            </a:r>
-            <a:r>
-              <a:rPr b="1"/>
-              <a:t>define → anchor → expand → refine → report</a:t>
+              <a:t>1 Open the Lab 05 files</a:t>
+            </a:r>
+          </a:p>
+        </p:txBody>
+      </p:sp>
+      <p:sp>
+        <p:nvSpPr>
+          <p:cNvPr id="1001" name="card-steel" descr="card: Literature search. Worksheet: lab schedule"/>
+          <p:cNvSpPr/>
+          <p:nvPr/>
+        </p:nvSpPr>
+        <p:spPr>
+          <a:xfrm>
+            <a:off x="1097280" y="2633472"/>
+            <a:ext cx="4924044" cy="1005840"/>
+          </a:xfrm>
+          <a:prstGeom prst="roundRect">
+            <a:avLst>
+              <a:gd name="adj" fmla="val 6000"/>
+            </a:avLst>
+          </a:prstGeom>
+          <a:solidFill>
+            <a:srgbClr val="FEFDFA"/>
+          </a:solidFill>
+          <a:ln w="19050">
+            <a:solidFill>
+              <a:srgbClr val="CCCCCC"/>
+            </a:solidFill>
+          </a:ln>
+        </p:spPr>
+        <p:txBody>
+          <a:bodyPr lIns="182880" tIns="182880" rIns="182880" bIns="182880" anchor="t" wrap="square">
+            <a:normAutofit/>
+          </a:bodyPr>
+          <a:lstStyle/>
+          <a:p>
+            <a:pPr algn="l"/>
+            <a:r>
+              <a:rPr lang="en-US" sz="2200" b="1" dirty="0">
+                <a:solidFill>
+                  <a:srgbClr val="010B13"/>
+                </a:solidFill>
+              </a:rPr>
+              <a:t>Literature search</a:t>
+            </a:r>
+          </a:p>
+          <a:p>
+            <a:pPr algn="l"/>
+            <a:r>
+              <a:rPr lang="en-US" sz="2000" b="0" dirty="0">
+                <a:solidFill>
+                  <a:srgbClr val="010B13"/>
+                </a:solidFill>
+                <a:hlinkClick r:id="rId3"/>
+              </a:rPr>
+              <a:t>Worksheet: lab schedule</a:t>
+            </a:r>
+          </a:p>
+        </p:txBody>
+      </p:sp>
+      <p:sp>
+        <p:nvSpPr>
+          <p:cNvPr id="1002" name="card-rail" descr="">
+            <a:extLst>
+              <a:ext uri="{C183D7F6-B498-43B3-948B-1728B52AA6E4}">
+                <adec:decorative xmlns:adec="http://schemas.microsoft.com/office/drawing/2017/decorative" val="1"/>
+              </a:ext>
+            </a:extLst>
+          </p:cNvPr>
+          <p:cNvSpPr/>
+          <p:nvPr/>
+        </p:nvSpPr>
+        <p:spPr>
+          <a:xfrm>
+            <a:off x="1097280" y="2633472"/>
+            <a:ext cx="54864" cy="1005840"/>
+          </a:xfrm>
+          <a:prstGeom prst="roundRect">
+            <a:avLst>
+              <a:gd name="adj" fmla="val 20000"/>
+            </a:avLst>
+          </a:prstGeom>
+          <a:solidFill>
+            <a:srgbClr val="010B13"/>
+          </a:solidFill>
+          <a:ln>
+            <a:noFill/>
+          </a:ln>
+        </p:spPr>
+        <p:txBody>
+          <a:bodyPr lIns="182880" tIns="182880" rIns="182880" bIns="182880" anchor="t" wrap="square">
+            <a:normAutofit/>
+          </a:bodyPr>
+          <a:lstStyle/>
+          <a:p/>
+        </p:txBody>
+      </p:sp>
+      <p:sp>
+        <p:nvSpPr>
+          <p:cNvPr id="1003" name="card-steel" descr="card: Project materials. Project files and preproposals"/>
+          <p:cNvSpPr/>
+          <p:nvPr/>
+        </p:nvSpPr>
+        <p:spPr>
+          <a:xfrm>
+            <a:off x="6167628" y="2633472"/>
+            <a:ext cx="4924044" cy="1005840"/>
+          </a:xfrm>
+          <a:prstGeom prst="roundRect">
+            <a:avLst>
+              <a:gd name="adj" fmla="val 6000"/>
+            </a:avLst>
+          </a:prstGeom>
+          <a:solidFill>
+            <a:srgbClr val="FEFDFA"/>
+          </a:solidFill>
+          <a:ln w="19050">
+            <a:solidFill>
+              <a:srgbClr val="CCCCCC"/>
+            </a:solidFill>
+          </a:ln>
+        </p:spPr>
+        <p:txBody>
+          <a:bodyPr lIns="182880" tIns="182880" rIns="182880" bIns="182880" anchor="t" wrap="square">
+            <a:normAutofit/>
+          </a:bodyPr>
+          <a:lstStyle/>
+          <a:p>
+            <a:pPr algn="l"/>
+            <a:r>
+              <a:rPr lang="en-US" sz="2200" b="1" dirty="0">
+                <a:solidFill>
+                  <a:srgbClr val="010B13"/>
+                </a:solidFill>
+              </a:rPr>
+              <a:t>Project materials</a:t>
+            </a:r>
+          </a:p>
+          <a:p>
+            <a:pPr algn="l"/>
+            <a:r>
+              <a:rPr lang="en-US" sz="2000" b="0" dirty="0">
+                <a:solidFill>
+                  <a:srgbClr val="010B13"/>
+                </a:solidFill>
+                <a:hlinkClick r:id="rId4"/>
+              </a:rPr>
+              <a:t>Project files and preproposals</a:t>
+            </a:r>
+          </a:p>
+        </p:txBody>
+      </p:sp>
+      <p:sp>
+        <p:nvSpPr>
+          <p:cNvPr id="1004" name="card-rail" descr="">
+            <a:extLst>
+              <a:ext uri="{C183D7F6-B498-43B3-948B-1728B52AA6E4}">
+                <adec:decorative xmlns:adec="http://schemas.microsoft.com/office/drawing/2017/decorative" val="1"/>
+              </a:ext>
+            </a:extLst>
+          </p:cNvPr>
+          <p:cNvSpPr/>
+          <p:nvPr/>
+        </p:nvSpPr>
+        <p:spPr>
+          <a:xfrm>
+            <a:off x="6167628" y="2633472"/>
+            <a:ext cx="54864" cy="1005840"/>
+          </a:xfrm>
+          <a:prstGeom prst="roundRect">
+            <a:avLst>
+              <a:gd name="adj" fmla="val 20000"/>
+            </a:avLst>
+          </a:prstGeom>
+          <a:solidFill>
+            <a:srgbClr val="010B13"/>
+          </a:solidFill>
+          <a:ln>
+            <a:noFill/>
+          </a:ln>
+        </p:spPr>
+        <p:txBody>
+          <a:bodyPr lIns="182880" tIns="182880" rIns="182880" bIns="182880" anchor="t" wrap="square">
+            <a:normAutofit/>
+          </a:bodyPr>
+          <a:lstStyle/>
+          <a:p/>
+        </p:txBody>
+      </p:sp>
+      <p:sp>
+        <p:nvSpPr>
+          <p:cNvPr id="1005" name="prose" descr=""/>
+          <p:cNvSpPr/>
+          <p:nvPr/>
+        </p:nvSpPr>
+        <p:spPr>
+          <a:xfrm>
+            <a:off x="1097280" y="3785616"/>
+            <a:ext cx="9994392" cy="304800"/>
+          </a:xfrm>
+          <a:prstGeom prst="roundRect">
+            <a:avLst>
+              <a:gd name="adj" fmla="val 6000"/>
+            </a:avLst>
+          </a:prstGeom>
+          <a:noFill/>
+          <a:ln>
+            <a:noFill/>
+          </a:ln>
+        </p:spPr>
+        <p:txBody>
+          <a:bodyPr lIns="182880" tIns="0" rIns="182880" bIns="0" anchor="t" wrap="square">
+            <a:normAutofit/>
+          </a:bodyPr>
+          <a:lstStyle/>
+          <a:p>
+            <a:pPr algn="l"/>
+            <a:r>
+              <a:rPr lang="en-US" sz="2000" b="0" dirty="0">
+                <a:solidFill>
+                  <a:srgbClr val="010B13"/>
+                </a:solidFill>
+              </a:rPr>
+              <a:t>Zotero: open your library</a:t>
+            </a:r>
+          </a:p>
+        </p:txBody>
+      </p:sp>
+      <p:sp>
+        <p:nvSpPr>
+          <p:cNvPr id="1006" name="prose" descr=""/>
+          <p:cNvSpPr/>
+          <p:nvPr/>
+        </p:nvSpPr>
+        <p:spPr>
+          <a:xfrm>
+            <a:off x="1097280" y="4236720"/>
+            <a:ext cx="9994392" cy="304800"/>
+          </a:xfrm>
+          <a:prstGeom prst="roundRect">
+            <a:avLst>
+              <a:gd name="adj" fmla="val 6000"/>
+            </a:avLst>
+          </a:prstGeom>
+          <a:noFill/>
+          <a:ln>
+            <a:noFill/>
+          </a:ln>
+        </p:spPr>
+        <p:txBody>
+          <a:bodyPr lIns="182880" tIns="0" rIns="182880" bIns="0" anchor="t" wrap="square">
+            <a:normAutofit/>
+          </a:bodyPr>
+          <a:lstStyle/>
+          <a:p>
+            <a:pPr algn="l"/>
+            <a:r>
+              <a:rPr lang="en-US" sz="2000" b="0" dirty="0">
+                <a:solidFill>
+                  <a:srgbClr val="010B13"/>
+                </a:solidFill>
+              </a:rPr>
+              <a:t>Choose your dataset and core variable before you search</a:t>
             </a:r>
           </a:p>
         </p:txBody>
@@ -5936,96 +5951,14 @@
             </a:pPr>
             <a:r>
               <a:rPr/>
-              <a:t>2 Build a connected research trail</a:t>
+              <a:t>2 Use research to develop your question</a:t>
             </a:r>
           </a:p>
         </p:txBody>
       </p:sp>
       <p:pic>
         <p:nvPicPr>
-          <p:cNvPr descr="Research cycle showing how questions, literature, hypotheses, design, data, analysis, and reporting connect and repeat" id="0" name="Picture 1"/>
-          <p:cNvPicPr>
-            <a:picLocks noGrp="1" noChangeAspect="1"/>
-          </p:cNvPicPr>
-          <p:nvPr/>
-        </p:nvPicPr>
-        <p:blipFill>
-          <a:blip r:embed="rId3"/>
-          <a:stretch>
-            <a:fillRect/>
-          </a:stretch>
-        </p:blipFill>
-        <p:spPr bwMode="auto">
-          <a:xfrm>
-            <a:off x="4546600" y="2628900"/>
-            <a:ext cx="3098800" cy="3098800"/>
-          </a:xfrm>
-          <a:prstGeom prst="rect">
-            <a:avLst/>
-          </a:prstGeom>
-          <a:noFill/>
-          <a:ln w="9525">
-            <a:noFill/>
-            <a:headEnd/>
-            <a:tailEnd/>
-          </a:ln>
-        </p:spPr>
-      </p:pic>
-    </p:spTree>
-  </p:cSld>
-</p:sld>
-</file>
-
-<file path=ppt/slides/slide4.xml><?xml version="1.0" encoding="utf-8"?>
-<p:sld xmlns:a="http://schemas.openxmlformats.org/drawingml/2006/main" xmlns:r="http://schemas.openxmlformats.org/officeDocument/2006/relationships" xmlns:p="http://schemas.openxmlformats.org/presentationml/2006/main">
-  <p:cSld>
-    <p:spTree>
-      <p:nvGrpSpPr>
-        <p:cNvPr id="1" name=""/>
-        <p:cNvGrpSpPr/>
-        <p:nvPr/>
-      </p:nvGrpSpPr>
-      <p:grpSpPr>
-        <a:xfrm>
-          <a:off x="0" y="0"/>
-          <a:ext cx="0" cy="0"/>
-          <a:chOff x="0" y="0"/>
-          <a:chExt cx="0" cy="0"/>
-        </a:xfrm>
-      </p:grpSpPr>
-      <p:sp>
-        <p:nvSpPr>
-          <p:cNvPr id="2" name="Title 1"/>
-          <p:cNvSpPr>
-            <a:spLocks noGrp="1"/>
-          </p:cNvSpPr>
-          <p:nvPr>
-            <p:ph type="title"/>
-          </p:nvPr>
-        </p:nvSpPr>
-        <p:spPr>
-          <a:xfrm>
-            <a:off x="1097280" y="964692"/>
-            <a:ext cx="9997440" cy="1188720"/>
-          </a:xfrm>
-        </p:spPr>
-        <p:txBody>
-          <a:bodyPr/>
-          <a:lstStyle/>
-          <a:p>
-            <a:pPr lvl="0" indent="0" marL="0">
-              <a:buNone/>
-            </a:pPr>
-            <a:r>
-              <a:rPr/>
-              <a:t>3 Define the construct first</a:t>
-            </a:r>
-          </a:p>
-        </p:txBody>
-      </p:sp>
-      <p:pic>
-        <p:nvPicPr>
-          <p:cNvPr descr="Example distinguishing a broad concept from the specific way it is measured in a research question" id="0" name="Picture 1"/>
+          <p:cNvPr descr="Research-process diagram with What, How, and Who columns. Reviewing the literature follows identifying a research question and precedes formulating a hypothesis. Later steps connect design, measurement, analysis, and reporting with samples and populations." id="0" name="Picture 1"/>
           <p:cNvPicPr>
             <a:picLocks noGrp="1" noChangeAspect="1"/>
           </p:cNvPicPr>
@@ -6068,20 +6001,137 @@
           <a:bodyPr/>
           <a:lstStyle/>
           <a:p>
+            <a:pPr lvl="0" indent="0" marL="0">
+              <a:buNone/>
+            </a:pPr>
+            <a:r>
+              <a:rPr/>
+              <a:t>Use earlier studies to develop your research question and a testable hypothesis</a:t>
+            </a:r>
+          </a:p>
+          <a:p>
+            <a:pPr lvl="0" indent="0" marL="0">
+              <a:buNone/>
+            </a:pPr>
+            <a:r>
+              <a:rPr/>
+              <a:t>Follow their references, keywords, and authors to find related work</a:t>
+            </a:r>
+          </a:p>
+        </p:txBody>
+      </p:sp>
+    </p:spTree>
+  </p:cSld>
+</p:sld>
+</file>
+
+<file path=ppt/slides/slide4.xml><?xml version="1.0" encoding="utf-8"?>
+<p:sld xmlns:a="http://schemas.openxmlformats.org/drawingml/2006/main" xmlns:r="http://schemas.openxmlformats.org/officeDocument/2006/relationships" xmlns:p="http://schemas.openxmlformats.org/presentationml/2006/main">
+  <p:cSld>
+    <p:spTree>
+      <p:nvGrpSpPr>
+        <p:cNvPr id="1" name=""/>
+        <p:cNvGrpSpPr/>
+        <p:nvPr/>
+      </p:nvGrpSpPr>
+      <p:grpSpPr>
+        <a:xfrm>
+          <a:off x="0" y="0"/>
+          <a:ext cx="0" cy="0"/>
+          <a:chOff x="0" y="0"/>
+          <a:chExt cx="0" cy="0"/>
+        </a:xfrm>
+      </p:grpSpPr>
+      <p:sp>
+        <p:nvSpPr>
+          <p:cNvPr id="2" name="Title 1"/>
+          <p:cNvSpPr>
+            <a:spLocks noGrp="1"/>
+          </p:cNvSpPr>
+          <p:nvPr>
+            <p:ph type="title"/>
+          </p:nvPr>
+        </p:nvSpPr>
+        <p:spPr>
+          <a:xfrm>
+            <a:off x="1097280" y="964692"/>
+            <a:ext cx="9997440" cy="1188720"/>
+          </a:xfrm>
+        </p:spPr>
+        <p:txBody>
+          <a:bodyPr/>
+          <a:lstStyle/>
+          <a:p>
+            <a:pPr lvl="0" indent="0" marL="0">
+              <a:buNone/>
+            </a:pPr>
+            <a:r>
+              <a:rPr/>
+              <a:t>3 Define the construct first</a:t>
+            </a:r>
+          </a:p>
+        </p:txBody>
+      </p:sp>
+      <p:pic>
+        <p:nvPicPr>
+          <p:cNvPr descr="How big is Superman? The words big and Superman are circled, prompting the reader to define the concept in the research question." id="0" name="Picture 1"/>
+          <p:cNvPicPr>
+            <a:picLocks noGrp="1" noChangeAspect="1"/>
+          </p:cNvPicPr>
+          <p:nvPr/>
+        </p:nvPicPr>
+        <p:blipFill>
+          <a:blip r:embed="rId3"/>
+          <a:stretch>
+            <a:fillRect/>
+          </a:stretch>
+        </p:blipFill>
+        <p:spPr bwMode="auto">
+          <a:xfrm>
+            <a:off x="1993900" y="2628900"/>
+            <a:ext cx="3098800" cy="3098800"/>
+          </a:xfrm>
+          <a:prstGeom prst="rect">
+            <a:avLst/>
+          </a:prstGeom>
+          <a:noFill/>
+          <a:ln w="9525">
+            <a:noFill/>
+            <a:headEnd/>
+            <a:tailEnd/>
+          </a:ln>
+        </p:spPr>
+      </p:pic>
+      <p:sp>
+        <p:nvSpPr>
+          <p:cNvPr id="4" name="Content Placeholder 3"/>
+          <p:cNvSpPr>
+            <a:spLocks noGrp="1"/>
+          </p:cNvSpPr>
+          <p:nvPr>
+            <p:ph idx="2" sz="half"/>
+          </p:nvPr>
+        </p:nvSpPr>
+        <p:spPr/>
+        <p:txBody>
+          <a:bodyPr/>
+          <a:lstStyle/>
+          <a:p>
+            <a:pPr lvl="0" indent="0" marL="0">
+              <a:buNone/>
+            </a:pPr>
+            <a:r>
+              <a:rPr/>
+              <a:t>[Worksheet Step 1]</a:t>
+            </a:r>
+          </a:p>
+          <a:p>
             <a:pPr lvl="0" indent="-457200" marL="457200">
               <a:buAutoNum type="arabicPeriod"/>
             </a:pPr>
             <a:r>
               <a:rPr/>
-              <a:t>Name the </a:t>
-            </a:r>
-            <a:r>
-              <a:rPr b="1"/>
-              <a:t>core variable</a:t>
-            </a:r>
-            <a:r>
-              <a:rPr/>
-              <a:t>.</a:t>
+              <a:t>Name your dataset and core variable</a:t>
             </a:r>
           </a:p>
           <a:p>
@@ -6090,15 +6140,7 @@
             </a:pPr>
             <a:r>
               <a:rPr/>
-              <a:t>Identify the </a:t>
-            </a:r>
-            <a:r>
-              <a:rPr b="1"/>
-              <a:t>construct</a:t>
-            </a:r>
-            <a:r>
-              <a:rPr/>
-              <a:t> it represents.</a:t>
+              <a:t>Define the construct in your own words</a:t>
             </a:r>
           </a:p>
           <a:p>
@@ -6107,16 +6149,16 @@
             </a:pPr>
             <a:r>
               <a:rPr/>
-              <a:t>Draft a plain-language conceptual definition.</a:t>
-            </a:r>
-          </a:p>
-          <a:p>
-            <a:pPr lvl="0" indent="-457200" marL="457200">
-              <a:buAutoNum type="arabicPeriod"/>
+              <a:t>Describe how that construct relates to other variables</a:t>
+            </a:r>
+          </a:p>
+          <a:p>
+            <a:pPr lvl="0" indent="0" marL="0">
+              <a:buNone/>
             </a:pPr>
             <a:r>
               <a:rPr/>
-              <a:t>List one or two related terms.</a:t>
+              <a:t>Start your search with the construct’s name</a:t>
             </a:r>
           </a:p>
         </p:txBody>
@@ -6168,14 +6210,14 @@
             </a:pPr>
             <a:r>
               <a:rPr/>
-              <a:t>4 Keep every source in Zotero</a:t>
+              <a:t>4 Keep selected sources in Zotero</a:t>
             </a:r>
           </a:p>
         </p:txBody>
       </p:sp>
       <p:pic>
         <p:nvPicPr>
-          <p:cNvPr descr="Current Zotero interface annotated to show collections on the left, library items in the center, and item metadata on the right" id="0" name="Picture 1"/>
+          <p:cNvPr descr="Zotero panels labeled collections on the left, items in the middle, and metadata on the right" id="0" name="Picture 1"/>
           <p:cNvPicPr>
             <a:picLocks noGrp="1" noChangeAspect="1"/>
           </p:cNvPicPr>
@@ -6227,30 +6269,26 @@
               <a:rPr b="1"/>
               <a:t>Lit Search worksheet</a:t>
             </a:r>
-            <a:r>
-              <a:rPr/>
-              <a:t>.</a:t>
-            </a:r>
           </a:p>
           <a:p>
             <a:pPr lvl="0"/>
             <a:r>
               <a:rPr/>
-              <a:t>Save the article and its PDF when available.</a:t>
+              <a:t>Save each selected source and its PDF when available</a:t>
             </a:r>
           </a:p>
           <a:p>
             <a:pPr lvl="0"/>
             <a:r>
               <a:rPr/>
-              <a:t>Check the metadata before generating a citation.</a:t>
+              <a:t>Check authors, title, year, and DOI against the source</a:t>
             </a:r>
           </a:p>
           <a:p>
             <a:pPr lvl="0"/>
             <a:r>
               <a:rPr/>
-              <a:t>Add useful keywords or notes as you read.</a:t>
+              <a:t>Paste reference entries into the worksheet as you go</a:t>
             </a:r>
           </a:p>
         </p:txBody>
@@ -6307,44 +6345,14 @@
           </a:p>
         </p:txBody>
       </p:sp>
-      <p:pic>
-        <p:nvPicPr>
-          <p:cNvPr descr="UNL Libraries database search page used to open APA PsycINFO" id="0" name="Picture 1"/>
-          <p:cNvPicPr>
-            <a:picLocks noGrp="1" noChangeAspect="1"/>
-          </p:cNvPicPr>
-          <p:nvPr/>
-        </p:nvPicPr>
-        <p:blipFill>
-          <a:blip r:embed="rId3"/>
-          <a:stretch>
-            <a:fillRect/>
-          </a:stretch>
-        </p:blipFill>
-        <p:spPr bwMode="auto">
-          <a:xfrm>
-            <a:off x="1612900" y="2628900"/>
-            <a:ext cx="3860800" cy="3098800"/>
-          </a:xfrm>
-          <a:prstGeom prst="rect">
-            <a:avLst/>
-          </a:prstGeom>
-          <a:noFill/>
-          <a:ln w="9525">
-            <a:noFill/>
-            <a:headEnd/>
-            <a:tailEnd/>
-          </a:ln>
-        </p:spPr>
-      </p:pic>
-      <p:sp>
-        <p:nvSpPr>
-          <p:cNvPr id="4" name="Content Placeholder 3"/>
-          <p:cNvSpPr>
-            <a:spLocks noGrp="1"/>
-          </p:cNvSpPr>
-          <p:nvPr>
-            <p:ph idx="2" sz="half"/>
+      <p:sp>
+        <p:nvSpPr>
+          <p:cNvPr id="3" name="Content Placeholder 2"/>
+          <p:cNvSpPr>
+            <a:spLocks noGrp="1"/>
+          </p:cNvSpPr>
+          <p:nvPr>
+            <p:ph idx="1"/>
           </p:nvPr>
         </p:nvSpPr>
         <p:spPr/>
@@ -6360,12 +6368,10 @@
               <a:t>Open </a:t>
             </a:r>
             <a:r>
-              <a:rPr b="1"/>
-              <a:t>APA PsycINFO</a:t>
-            </a:r>
-            <a:r>
-              <a:rPr/>
-              <a:t> through UNL Libraries.</a:t>
+              <a:rPr>
+                <a:hlinkClick r:id="rId3"/>
+              </a:rPr>
+              <a:t>UNL Libraries</a:t>
             </a:r>
           </a:p>
           <a:p>
@@ -6374,7 +6380,11 @@
             </a:pPr>
             <a:r>
               <a:rPr/>
-              <a:t>Search the construct—not only the measure.</a:t>
+              <a:t>Use the database listing to find </a:t>
+            </a:r>
+            <a:r>
+              <a:rPr b="1"/>
+              <a:t>APA PsycINFO</a:t>
             </a:r>
           </a:p>
           <a:p>
@@ -6383,7 +6393,16 @@
             </a:pPr>
             <a:r>
               <a:rPr/>
-              <a:t>Read titles and abstracts before saving.</a:t>
+              <a:t>Search your construct</a:t>
+            </a:r>
+          </a:p>
+          <a:p>
+            <a:pPr lvl="0" indent="-457200" marL="457200">
+              <a:buAutoNum type="arabicPeriod"/>
+            </a:pPr>
+            <a:r>
+              <a:rPr/>
+              <a:t>Read titles and abstracts before selecting sources</a:t>
             </a:r>
           </a:p>
         </p:txBody>
@@ -6435,74 +6454,61 @@
             </a:pPr>
             <a:r>
               <a:rPr/>
-              <a:t>6 Find one classic anchor</a:t>
-            </a:r>
-          </a:p>
-        </p:txBody>
-      </p:sp>
-      <p:pic>
-        <p:nvPicPr>
-          <p:cNvPr descr="PsycINFO search results with controls for sorting and filtering articles by date" id="0" name="Picture 1"/>
-          <p:cNvPicPr>
-            <a:picLocks noGrp="1" noChangeAspect="1"/>
-          </p:cNvPicPr>
-          <p:nvPr/>
-        </p:nvPicPr>
-        <p:blipFill>
-          <a:blip r:embed="rId3"/>
-          <a:stretch>
-            <a:fillRect/>
-          </a:stretch>
-        </p:blipFill>
-        <p:spPr bwMode="auto">
-          <a:xfrm>
-            <a:off x="1663700" y="2628900"/>
-            <a:ext cx="3759200" cy="3098800"/>
-          </a:xfrm>
-          <a:prstGeom prst="rect">
-            <a:avLst/>
-          </a:prstGeom>
-          <a:noFill/>
-          <a:ln w="9525">
-            <a:noFill/>
-            <a:headEnd/>
-            <a:tailEnd/>
-          </a:ln>
-        </p:spPr>
-      </p:pic>
-      <p:sp>
-        <p:nvSpPr>
-          <p:cNvPr id="4" name="Content Placeholder 3"/>
-          <p:cNvSpPr>
-            <a:spLocks noGrp="1"/>
-          </p:cNvSpPr>
-          <p:nvPr>
-            <p:ph idx="2" sz="half"/>
-          </p:nvPr>
-        </p:nvSpPr>
-        <p:spPr/>
-        <p:txBody>
-          <a:bodyPr/>
-          <a:lstStyle/>
+              <a:t>6 Find one classic reference</a:t>
+            </a:r>
+          </a:p>
+        </p:txBody>
+      </p:sp>
+      <p:sp>
+        <p:nvSpPr>
+          <p:cNvPr id="3" name="Content Placeholder 2"/>
+          <p:cNvSpPr>
+            <a:spLocks noGrp="1"/>
+          </p:cNvSpPr>
+          <p:nvPr>
+            <p:ph idx="1"/>
+          </p:nvPr>
+        </p:nvSpPr>
+        <p:spPr/>
+        <p:txBody>
+          <a:bodyPr/>
+          <a:lstStyle/>
+          <a:p>
+            <a:pPr lvl="0" indent="0" marL="0">
+              <a:buNone/>
+            </a:pPr>
+            <a:r>
+              <a:rPr/>
+              <a:t>[Worksheet Step 1]</a:t>
+            </a:r>
+          </a:p>
           <a:p>
             <a:pPr lvl="0"/>
             <a:r>
               <a:rPr/>
-              <a:t>Look for an early or highly cited empirical article.</a:t>
+              <a:t>Find an early or highly cited </a:t>
+            </a:r>
+            <a:r>
+              <a:rPr b="1"/>
+              <a:t>empirical article</a:t>
+            </a:r>
+            <a:r>
+              <a:rPr/>
+              <a:t> about your construct</a:t>
             </a:r>
           </a:p>
           <a:p>
             <a:pPr lvl="0"/>
             <a:r>
               <a:rPr/>
-              <a:t>Check that it actually studies the construct.</a:t>
+              <a:t>Check why later researchers use it</a:t>
             </a:r>
           </a:p>
           <a:p>
             <a:pPr lvl="0"/>
             <a:r>
               <a:rPr/>
-              <a:t>Save it as the </a:t>
+              <a:t>Save it in Zotero and paste its reference into the </a:t>
             </a:r>
             <a:r>
               <a:rPr b="1"/>
@@ -6510,7 +6516,7 @@
             </a:r>
             <a:r>
               <a:rPr/>
-              <a:t>.</a:t>
+              <a:t> box</a:t>
             </a:r>
           </a:p>
         </p:txBody>
@@ -6562,82 +6568,57 @@
             </a:pPr>
             <a:r>
               <a:rPr/>
-              <a:t>7 Add one recent anchor</a:t>
-            </a:r>
-          </a:p>
-        </p:txBody>
-      </p:sp>
-      <p:pic>
-        <p:nvPicPr>
-          <p:cNvPr descr="PsycINFO results filtered to show a recent article relevant to the search topic" id="0" name="Picture 1"/>
-          <p:cNvPicPr>
-            <a:picLocks noGrp="1" noChangeAspect="1"/>
-          </p:cNvPicPr>
-          <p:nvPr/>
-        </p:nvPicPr>
-        <p:blipFill>
-          <a:blip r:embed="rId3"/>
-          <a:stretch>
-            <a:fillRect/>
-          </a:stretch>
-        </p:blipFill>
-        <p:spPr bwMode="auto">
-          <a:xfrm>
-            <a:off x="1663700" y="2628900"/>
-            <a:ext cx="3759200" cy="3098800"/>
-          </a:xfrm>
-          <a:prstGeom prst="rect">
-            <a:avLst/>
-          </a:prstGeom>
-          <a:noFill/>
-          <a:ln w="9525">
-            <a:noFill/>
-            <a:headEnd/>
-            <a:tailEnd/>
-          </a:ln>
-        </p:spPr>
-      </p:pic>
-      <p:sp>
-        <p:nvSpPr>
-          <p:cNvPr id="4" name="Content Placeholder 3"/>
-          <p:cNvSpPr>
-            <a:spLocks noGrp="1"/>
-          </p:cNvSpPr>
-          <p:nvPr>
-            <p:ph idx="2" sz="half"/>
-          </p:nvPr>
-        </p:nvSpPr>
-        <p:spPr/>
-        <p:txBody>
-          <a:bodyPr/>
-          <a:lstStyle/>
+              <a:t>7 Add one recent reference</a:t>
+            </a:r>
+          </a:p>
+        </p:txBody>
+      </p:sp>
+      <p:sp>
+        <p:nvSpPr>
+          <p:cNvPr id="3" name="Content Placeholder 2"/>
+          <p:cNvSpPr>
+            <a:spLocks noGrp="1"/>
+          </p:cNvSpPr>
+          <p:nvPr>
+            <p:ph idx="1"/>
+          </p:nvPr>
+        </p:nvSpPr>
+        <p:spPr/>
+        <p:txBody>
+          <a:bodyPr/>
+          <a:lstStyle/>
+          <a:p>
+            <a:pPr lvl="0" indent="0" marL="0">
+              <a:buNone/>
+            </a:pPr>
+            <a:r>
+              <a:rPr/>
+              <a:t>[Worksheet Step 1]</a:t>
+            </a:r>
+          </a:p>
           <a:p>
             <a:pPr lvl="0"/>
             <a:r>
               <a:rPr/>
-              <a:t>Limit results to the </a:t>
+              <a:t>Limit the search to the </a:t>
             </a:r>
             <a:r>
               <a:rPr b="1"/>
               <a:t>last five years</a:t>
             </a:r>
-            <a:r>
-              <a:rPr/>
-              <a:t>.</a:t>
-            </a:r>
           </a:p>
           <a:p>
             <a:pPr lvl="0"/>
             <a:r>
               <a:rPr/>
-              <a:t>Choose a relevant empirical article.</a:t>
+              <a:t>Choose an article relevant to your project</a:t>
             </a:r>
           </a:p>
           <a:p>
             <a:pPr lvl="0"/>
             <a:r>
               <a:rPr/>
-              <a:t>Save it as the </a:t>
+              <a:t>Save it in Zotero and paste its reference into the </a:t>
             </a:r>
             <a:r>
               <a:rPr b="1"/>
@@ -6645,7 +6626,7 @@
             </a:r>
             <a:r>
               <a:rPr/>
-              <a:t>.</a:t>
+              <a:t> box</a:t>
             </a:r>
           </a:p>
         </p:txBody>
@@ -6702,65 +6683,40 @@
           </a:p>
         </p:txBody>
       </p:sp>
-      <p:pic>
-        <p:nvPicPr>
-          <p:cNvPr descr="Article record showing links for finding sources that cite the selected article" id="0" name="Picture 1"/>
-          <p:cNvPicPr>
-            <a:picLocks noGrp="1" noChangeAspect="1"/>
-          </p:cNvPicPr>
-          <p:nvPr/>
-        </p:nvPicPr>
-        <p:blipFill>
-          <a:blip r:embed="rId3"/>
-          <a:stretch>
-            <a:fillRect/>
-          </a:stretch>
-        </p:blipFill>
-        <p:spPr bwMode="auto">
-          <a:xfrm>
-            <a:off x="1270000" y="2628900"/>
-            <a:ext cx="4546600" cy="3098800"/>
-          </a:xfrm>
-          <a:prstGeom prst="rect">
-            <a:avLst/>
-          </a:prstGeom>
-          <a:noFill/>
-          <a:ln w="9525">
-            <a:noFill/>
-            <a:headEnd/>
-            <a:tailEnd/>
-          </a:ln>
-        </p:spPr>
-      </p:pic>
-      <p:sp>
-        <p:nvSpPr>
-          <p:cNvPr id="4" name="Content Placeholder 3"/>
-          <p:cNvSpPr>
-            <a:spLocks noGrp="1"/>
-          </p:cNvSpPr>
-          <p:nvPr>
-            <p:ph idx="2" sz="half"/>
-          </p:nvPr>
-        </p:nvSpPr>
-        <p:spPr/>
-        <p:txBody>
-          <a:bodyPr/>
-          <a:lstStyle/>
+      <p:sp>
+        <p:nvSpPr>
+          <p:cNvPr id="3" name="Content Placeholder 2"/>
+          <p:cNvSpPr>
+            <a:spLocks noGrp="1"/>
+          </p:cNvSpPr>
+          <p:nvPr>
+            <p:ph idx="1"/>
+          </p:nvPr>
+        </p:nvSpPr>
+        <p:spPr/>
+        <p:txBody>
+          <a:bodyPr/>
+          <a:lstStyle/>
+          <a:p>
+            <a:pPr lvl="0" indent="0" marL="0">
+              <a:buNone/>
+            </a:pPr>
+            <a:r>
+              <a:rPr/>
+              <a:t>[Worksheet Step 2]</a:t>
+            </a:r>
+          </a:p>
           <a:p>
             <a:pPr lvl="0" indent="-457200" marL="457200">
               <a:buAutoNum type="arabicPeriod"/>
             </a:pPr>
             <a:r>
               <a:rPr/>
-              <a:t>Open </a:t>
+              <a:t>Find papers that cite your classic article using </a:t>
             </a:r>
             <a:r>
               <a:rPr b="1"/>
               <a:t>Cited by</a:t>
-            </a:r>
-            <a:r>
-              <a:rPr/>
-              <a:t>.</a:t>
             </a:r>
           </a:p>
           <a:p>
@@ -6769,7 +6725,11 @@
             </a:pPr>
             <a:r>
               <a:rPr/>
-              <a:t>Limit to the last five years.</a:t>
+              <a:t>Limit them to the </a:t>
+            </a:r>
+            <a:r>
+              <a:rPr b="1"/>
+              <a:t>last five years</a:t>
             </a:r>
           </a:p>
           <a:p>
@@ -6778,7 +6738,11 @@
             </a:pPr>
             <a:r>
               <a:rPr/>
-              <a:t>Select three relevant articles.</a:t>
+              <a:t>Choose </a:t>
+            </a:r>
+            <a:r>
+              <a:rPr b="1"/>
+              <a:t>three other relevant papers</a:t>
             </a:r>
           </a:p>
           <a:p>
@@ -6787,7 +6751,7 @@
             </a:pPr>
             <a:r>
               <a:rPr/>
-              <a:t>Save and cite each one.</a:t>
+              <a:t>Save them in Zotero and paste their reference entries</a:t>
             </a:r>
           </a:p>
         </p:txBody>
